--- a/examples/medical/out/deck.pptx
+++ b/examples/medical/out/deck.pptx
@@ -5055,8 +5055,8 @@
         </p:nvSpPr>
         <p:spPr>
           <a:xfrm>
-            <a:off x="822960" y="2939732"/>
-            <a:ext cx="2240280" cy="841375"/>
+            <a:off x="822960" y="2947670"/>
+            <a:ext cx="2240280" cy="825500"/>
           </a:xfrm>
           <a:prstGeom prst="rect">
             <a:avLst/>
@@ -5073,7 +5073,7 @@
               </a:lnSpc>
             </a:pPr>
             <a:r>
-              <a:rPr sz="5300" b="1">
+              <a:rPr sz="5200" b="1">
                 <a:solidFill>
                   <a:srgbClr val="0E9AA7"/>
                 </a:solidFill>
@@ -5105,7 +5105,7 @@
         </p:nvCxnSpPr>
         <p:spPr>
           <a:xfrm>
-            <a:off x="822960" y="3918268"/>
+            <a:off x="822960" y="3910330"/>
             <a:ext cx="640080" cy="0"/>
           </a:xfrm>
           <a:prstGeom prst="line">
@@ -5140,7 +5140,7 @@
         </p:nvSpPr>
         <p:spPr>
           <a:xfrm>
-            <a:off x="822960" y="4101148"/>
+            <a:off x="822960" y="4093210"/>
             <a:ext cx="2194560" cy="457200"/>
           </a:xfrm>
           <a:prstGeom prst="rect">
@@ -5179,8 +5179,8 @@
         </p:nvSpPr>
         <p:spPr>
           <a:xfrm>
-            <a:off x="3474720" y="2939732"/>
-            <a:ext cx="1965960" cy="841375"/>
+            <a:off x="3474720" y="2947670"/>
+            <a:ext cx="1965960" cy="825500"/>
           </a:xfrm>
           <a:prstGeom prst="rect">
             <a:avLst/>
@@ -5197,7 +5197,7 @@
               </a:lnSpc>
             </a:pPr>
             <a:r>
-              <a:rPr sz="5300" b="1">
+              <a:rPr sz="5200" b="1">
                 <a:solidFill>
                   <a:srgbClr val="0E9AA7"/>
                 </a:solidFill>
@@ -5229,7 +5229,7 @@
         </p:nvCxnSpPr>
         <p:spPr>
           <a:xfrm>
-            <a:off x="3474720" y="3918268"/>
+            <a:off x="3474720" y="3910330"/>
             <a:ext cx="640080" cy="0"/>
           </a:xfrm>
           <a:prstGeom prst="line">
@@ -5264,7 +5264,7 @@
         </p:nvSpPr>
         <p:spPr>
           <a:xfrm>
-            <a:off x="3474720" y="4101148"/>
+            <a:off x="3474720" y="4093210"/>
             <a:ext cx="1920240" cy="457200"/>
           </a:xfrm>
           <a:prstGeom prst="rect">
@@ -5303,8 +5303,8 @@
         </p:nvCxnSpPr>
         <p:spPr>
           <a:xfrm>
-            <a:off x="3200400" y="3076892"/>
-            <a:ext cx="0" cy="1481456"/>
+            <a:off x="3200400" y="3084830"/>
+            <a:ext cx="0" cy="1465580"/>
           </a:xfrm>
           <a:prstGeom prst="line">
             <a:avLst/>
@@ -5338,8 +5338,8 @@
         </p:nvSpPr>
         <p:spPr>
           <a:xfrm>
-            <a:off x="5852160" y="2939732"/>
-            <a:ext cx="1965960" cy="841375"/>
+            <a:off x="5852160" y="2947670"/>
+            <a:ext cx="1965960" cy="825500"/>
           </a:xfrm>
           <a:prstGeom prst="rect">
             <a:avLst/>
@@ -5356,7 +5356,7 @@
               </a:lnSpc>
             </a:pPr>
             <a:r>
-              <a:rPr sz="5300" b="1">
+              <a:rPr sz="5200" b="1">
                 <a:solidFill>
                   <a:srgbClr val="0E9AA7"/>
                 </a:solidFill>
@@ -5388,7 +5388,7 @@
         </p:nvCxnSpPr>
         <p:spPr>
           <a:xfrm>
-            <a:off x="5852160" y="3918268"/>
+            <a:off x="5852160" y="3910330"/>
             <a:ext cx="640080" cy="0"/>
           </a:xfrm>
           <a:prstGeom prst="line">
@@ -5423,7 +5423,7 @@
         </p:nvSpPr>
         <p:spPr>
           <a:xfrm>
-            <a:off x="5852160" y="4101148"/>
+            <a:off x="5852160" y="4093210"/>
             <a:ext cx="1920240" cy="457200"/>
           </a:xfrm>
           <a:prstGeom prst="rect">
@@ -5462,8 +5462,8 @@
         </p:nvCxnSpPr>
         <p:spPr>
           <a:xfrm>
-            <a:off x="5577840" y="3076892"/>
-            <a:ext cx="0" cy="1481456"/>
+            <a:off x="5577840" y="3084830"/>
+            <a:ext cx="0" cy="1465580"/>
           </a:xfrm>
           <a:prstGeom prst="line">
             <a:avLst/>
@@ -5497,8 +5497,8 @@
         </p:nvSpPr>
         <p:spPr>
           <a:xfrm>
-            <a:off x="8229600" y="2939732"/>
-            <a:ext cx="1965960" cy="841375"/>
+            <a:off x="8229600" y="2947670"/>
+            <a:ext cx="1965960" cy="825500"/>
           </a:xfrm>
           <a:prstGeom prst="rect">
             <a:avLst/>
@@ -5515,7 +5515,7 @@
               </a:lnSpc>
             </a:pPr>
             <a:r>
-              <a:rPr sz="5300" b="1">
+              <a:rPr sz="5200" b="1">
                 <a:solidFill>
                   <a:srgbClr val="0E9AA7"/>
                 </a:solidFill>
@@ -5547,7 +5547,7 @@
         </p:nvCxnSpPr>
         <p:spPr>
           <a:xfrm>
-            <a:off x="8229600" y="3918268"/>
+            <a:off x="8229600" y="3910330"/>
             <a:ext cx="640080" cy="0"/>
           </a:xfrm>
           <a:prstGeom prst="line">
@@ -5582,7 +5582,7 @@
         </p:nvSpPr>
         <p:spPr>
           <a:xfrm>
-            <a:off x="8229600" y="4101148"/>
+            <a:off x="8229600" y="4093210"/>
             <a:ext cx="1920240" cy="457200"/>
           </a:xfrm>
           <a:prstGeom prst="rect">
@@ -5621,8 +5621,8 @@
         </p:nvCxnSpPr>
         <p:spPr>
           <a:xfrm>
-            <a:off x="7955280" y="3076892"/>
-            <a:ext cx="0" cy="1481456"/>
+            <a:off x="7955280" y="3084830"/>
+            <a:ext cx="0" cy="1465580"/>
           </a:xfrm>
           <a:prstGeom prst="line">
             <a:avLst/>
